--- a/presentacion/SIGEO-HD_Reunion_Mandos.pptx
+++ b/presentacion/SIGEO-HD_Reunion_Mandos.pptx
@@ -3304,7 +3304,7 @@
                 </a:solidFill>
                 <a:latin typeface="Segoe UI"/>
               </a:rPr>
-              <a:t>Documento de trabajo interno · generado 2026-07-28 19:19 · cifras sin validar por las áreas responsables</a:t>
+              <a:t>Documento de trabajo interno · generado 2026-08-08 20:19 · cifras sin validar por las áreas responsables</a:t>
             </a:r>
           </a:p>
         </p:txBody>
@@ -3444,7 +3444,7 @@
                 </a:solidFill>
                 <a:latin typeface="Segoe UI"/>
               </a:rPr>
-              <a:t>120 horas de operación C5 · 22,811 llamadas · 27 municipios con homicidio</a:t>
+              <a:t>218 horas de operación C5 · 36,672 llamadas · 27 municipios con homicidio</a:t>
             </a:r>
           </a:p>
         </p:txBody>
@@ -4593,7 +4593,7 @@
                           </a:solidFill>
                           <a:latin typeface="Segoe UI"/>
                         </a:rPr>
-                        <a:t>11</a:t>
+                        <a:t>12</a:t>
                       </a:r>
                     </a:p>
                   </a:txBody>
@@ -4662,7 +4662,7 @@
                           </a:solidFill>
                           <a:latin typeface="Segoe UI"/>
                         </a:rPr>
-                        <a:t>68.9</a:t>
+                        <a:t>118.4</a:t>
                       </a:r>
                     </a:p>
                   </a:txBody>
@@ -4687,7 +4687,7 @@
                           </a:solidFill>
                           <a:latin typeface="Segoe UI"/>
                         </a:rPr>
-                        <a:t>Ecatepec</a:t>
+                        <a:t>Valle Toluca</a:t>
                       </a:r>
                     </a:p>
                   </a:txBody>
@@ -4710,7 +4710,7 @@
                           </a:solidFill>
                           <a:latin typeface="Segoe UI"/>
                         </a:rPr>
-                        <a:t>15</a:t>
+                        <a:t>16</a:t>
                       </a:r>
                     </a:p>
                   </a:txBody>
@@ -4733,7 +4733,7 @@
                           </a:solidFill>
                           <a:latin typeface="Segoe UI"/>
                         </a:rPr>
-                        <a:t>20</a:t>
+                        <a:t>1</a:t>
                       </a:r>
                     </a:p>
                   </a:txBody>
@@ -4756,7 +4756,7 @@
                           </a:solidFill>
                           <a:latin typeface="Segoe UI"/>
                         </a:rPr>
-                        <a:t>1,841</a:t>
+                        <a:t>1,498</a:t>
                       </a:r>
                     </a:p>
                   </a:txBody>
@@ -4779,7 +4779,7 @@
                           </a:solidFill>
                           <a:latin typeface="Segoe UI"/>
                         </a:rPr>
-                        <a:t>51.7</a:t>
+                        <a:t>105.5</a:t>
                       </a:r>
                     </a:p>
                   </a:txBody>
@@ -4804,7 +4804,7 @@
                           </a:solidFill>
                           <a:latin typeface="Segoe UI"/>
                         </a:rPr>
-                        <a:t>Valle Toluca</a:t>
+                        <a:t>Ecatepec</a:t>
                       </a:r>
                     </a:p>
                   </a:txBody>
@@ -4827,7 +4827,7 @@
                           </a:solidFill>
                           <a:latin typeface="Segoe UI"/>
                         </a:rPr>
-                        <a:t>16</a:t>
+                        <a:t>15</a:t>
                       </a:r>
                     </a:p>
                   </a:txBody>
@@ -4850,7 +4850,7 @@
                           </a:solidFill>
                           <a:latin typeface="Segoe UI"/>
                         </a:rPr>
-                        <a:t>1</a:t>
+                        <a:t>20</a:t>
                       </a:r>
                     </a:p>
                   </a:txBody>
@@ -4873,7 +4873,7 @@
                           </a:solidFill>
                           <a:latin typeface="Segoe UI"/>
                         </a:rPr>
-                        <a:t>1,498</a:t>
+                        <a:t>1,841</a:t>
                       </a:r>
                     </a:p>
                   </a:txBody>
@@ -4896,7 +4896,7 @@
                           </a:solidFill>
                           <a:latin typeface="Segoe UI"/>
                         </a:rPr>
-                        <a:t>57.4</a:t>
+                        <a:t>84.3</a:t>
                       </a:r>
                     </a:p>
                   </a:txBody>
@@ -4944,7 +4944,7 @@
                           </a:solidFill>
                           <a:latin typeface="Segoe UI"/>
                         </a:rPr>
-                        <a:t>16</a:t>
+                        <a:t>17</a:t>
                       </a:r>
                     </a:p>
                   </a:txBody>
@@ -5013,7 +5013,7 @@
                           </a:solidFill>
                           <a:latin typeface="Segoe UI"/>
                         </a:rPr>
-                        <a:t>34.1</a:t>
+                        <a:t>55.8</a:t>
                       </a:r>
                     </a:p>
                   </a:txBody>
@@ -5061,7 +5061,7 @@
                           </a:solidFill>
                           <a:latin typeface="Segoe UI"/>
                         </a:rPr>
-                        <a:t>12</a:t>
+                        <a:t>14</a:t>
                       </a:r>
                     </a:p>
                   </a:txBody>
@@ -5107,7 +5107,7 @@
                           </a:solidFill>
                           <a:latin typeface="Segoe UI"/>
                         </a:rPr>
-                        <a:t>1,643</a:t>
+                        <a:t>1,699</a:t>
                       </a:r>
                     </a:p>
                   </a:txBody>
@@ -5130,7 +5130,7 @@
                           </a:solidFill>
                           <a:latin typeface="Segoe UI"/>
                         </a:rPr>
-                        <a:t>21.2</a:t>
+                        <a:t>38.7</a:t>
                       </a:r>
                     </a:p>
                   </a:txBody>
@@ -5247,7 +5247,7 @@
                           </a:solidFill>
                           <a:latin typeface="Segoe UI"/>
                         </a:rPr>
-                        <a:t>19.2</a:t>
+                        <a:t>33.2</a:t>
                       </a:r>
                     </a:p>
                   </a:txBody>
@@ -5364,7 +5364,7 @@
                           </a:solidFill>
                           <a:latin typeface="Segoe UI"/>
                         </a:rPr>
-                        <a:t>13.9</a:t>
+                        <a:t>25.0</a:t>
                       </a:r>
                     </a:p>
                   </a:txBody>
@@ -5412,7 +5412,7 @@
                           </a:solidFill>
                           <a:latin typeface="Segoe UI"/>
                         </a:rPr>
-                        <a:t>9</a:t>
+                        <a:t>11</a:t>
                       </a:r>
                     </a:p>
                   </a:txBody>
@@ -5481,7 +5481,7 @@
                           </a:solidFill>
                           <a:latin typeface="Segoe UI"/>
                         </a:rPr>
-                        <a:t>14.2</a:t>
+                        <a:t>26.4</a:t>
                       </a:r>
                     </a:p>
                   </a:txBody>
@@ -5686,7 +5686,7 @@
                 </a:solidFill>
                 <a:latin typeface="Segoe UI"/>
               </a:rPr>
-              <a:t>363 sectores con violencia registrada · 78 desatendidos · 43 saturados</a:t>
+              <a:t>489 sectores con violencia registrada · 130 desatendidos · 81 saturados</a:t>
             </a:r>
           </a:p>
         </p:txBody>
@@ -5924,7 +5924,7 @@
                           </a:solidFill>
                           <a:latin typeface="Segoe UI"/>
                         </a:rPr>
-                        <a:t>166.0</a:t>
+                        <a:t>263.7</a:t>
                       </a:r>
                     </a:p>
                   </a:txBody>
@@ -6018,7 +6018,7 @@
                           </a:solidFill>
                           <a:latin typeface="Segoe UI"/>
                         </a:rPr>
-                        <a:t>150.4</a:t>
+                        <a:t>240.0</a:t>
                       </a:r>
                     </a:p>
                   </a:txBody>
@@ -6041,7 +6041,7 @@
                           </a:solidFill>
                           <a:latin typeface="Segoe UI"/>
                         </a:rPr>
-                        <a:t>4.14 km</a:t>
+                        <a:t>6.48 km</a:t>
                       </a:r>
                     </a:p>
                   </a:txBody>
@@ -6089,7 +6089,7 @@
                           </a:solidFill>
                           <a:latin typeface="Segoe UI"/>
                         </a:rPr>
-                        <a:t>Toluca</a:t>
+                        <a:t>Naucalpan</a:t>
                       </a:r>
                     </a:p>
                   </a:txBody>
@@ -6112,7 +6112,7 @@
                           </a:solidFill>
                           <a:latin typeface="Segoe UI"/>
                         </a:rPr>
-                        <a:t>140.0</a:t>
+                        <a:t>237.3</a:t>
                       </a:r>
                     </a:p>
                   </a:txBody>
@@ -6135,7 +6135,7 @@
                           </a:solidFill>
                           <a:latin typeface="Segoe UI"/>
                         </a:rPr>
-                        <a:t>6.48 km</a:t>
+                        <a:t>4.59 km</a:t>
                       </a:r>
                     </a:p>
                   </a:txBody>
@@ -6183,7 +6183,7 @@
                           </a:solidFill>
                           <a:latin typeface="Segoe UI"/>
                         </a:rPr>
-                        <a:t>Naucalpan</a:t>
+                        <a:t>Toluca</a:t>
                       </a:r>
                     </a:p>
                   </a:txBody>
@@ -6206,7 +6206,7 @@
                           </a:solidFill>
                           <a:latin typeface="Segoe UI"/>
                         </a:rPr>
-                        <a:t>105.5</a:t>
+                        <a:t>221.0</a:t>
                       </a:r>
                     </a:p>
                   </a:txBody>
@@ -6229,7 +6229,7 @@
                           </a:solidFill>
                           <a:latin typeface="Segoe UI"/>
                         </a:rPr>
-                        <a:t>4.59 km</a:t>
+                        <a:t>4.14 km</a:t>
                       </a:r>
                     </a:p>
                   </a:txBody>
@@ -6277,7 +6277,7 @@
                           </a:solidFill>
                           <a:latin typeface="Segoe UI"/>
                         </a:rPr>
-                        <a:t>Tultepec</a:t>
+                        <a:t>Toluca</a:t>
                       </a:r>
                     </a:p>
                   </a:txBody>
@@ -6300,7 +6300,7 @@
                           </a:solidFill>
                           <a:latin typeface="Segoe UI"/>
                         </a:rPr>
-                        <a:t>100.0</a:t>
+                        <a:t>204.7</a:t>
                       </a:r>
                     </a:p>
                   </a:txBody>
@@ -6323,7 +6323,7 @@
                           </a:solidFill>
                           <a:latin typeface="Segoe UI"/>
                         </a:rPr>
-                        <a:t>5.41 km</a:t>
+                        <a:t>4.25 km</a:t>
                       </a:r>
                     </a:p>
                   </a:txBody>
@@ -6371,7 +6371,7 @@
                           </a:solidFill>
                           <a:latin typeface="Segoe UI"/>
                         </a:rPr>
-                        <a:t>Toluca</a:t>
+                        <a:t>Valle de Chalco</a:t>
                       </a:r>
                     </a:p>
                   </a:txBody>
@@ -6394,7 +6394,7 @@
                           </a:solidFill>
                           <a:latin typeface="Segoe UI"/>
                         </a:rPr>
-                        <a:t>94.2</a:t>
+                        <a:t>180.8</a:t>
                       </a:r>
                     </a:p>
                   </a:txBody>
@@ -6417,7 +6417,7 @@
                           </a:solidFill>
                           <a:latin typeface="Segoe UI"/>
                         </a:rPr>
-                        <a:t>4.17 km</a:t>
+                        <a:t>3.02 km</a:t>
                       </a:r>
                     </a:p>
                   </a:txBody>
@@ -6465,7 +6465,7 @@
                           </a:solidFill>
                           <a:latin typeface="Segoe UI"/>
                         </a:rPr>
-                        <a:t>Valle de Chalco</a:t>
+                        <a:t>Ecatepec</a:t>
                       </a:r>
                     </a:p>
                   </a:txBody>
@@ -6488,7 +6488,7 @@
                           </a:solidFill>
                           <a:latin typeface="Segoe UI"/>
                         </a:rPr>
-                        <a:t>90.4</a:t>
+                        <a:t>164.7</a:t>
                       </a:r>
                     </a:p>
                   </a:txBody>
@@ -6511,7 +6511,7 @@
                           </a:solidFill>
                           <a:latin typeface="Segoe UI"/>
                         </a:rPr>
-                        <a:t>3.02 km</a:t>
+                        <a:t>3.49 km</a:t>
                       </a:r>
                     </a:p>
                   </a:txBody>
@@ -6559,7 +6559,7 @@
                           </a:solidFill>
                           <a:latin typeface="Segoe UI"/>
                         </a:rPr>
-                        <a:t>Ecatepec</a:t>
+                        <a:t>Cuautitlan Izcalli</a:t>
                       </a:r>
                     </a:p>
                   </a:txBody>
@@ -6582,7 +6582,7 @@
                           </a:solidFill>
                           <a:latin typeface="Segoe UI"/>
                         </a:rPr>
-                        <a:t>89.2</a:t>
+                        <a:t>149.5</a:t>
                       </a:r>
                     </a:p>
                   </a:txBody>
@@ -6605,7 +6605,7 @@
                           </a:solidFill>
                           <a:latin typeface="Segoe UI"/>
                         </a:rPr>
-                        <a:t>3.49 km</a:t>
+                        <a:t>3.92 km</a:t>
                       </a:r>
                     </a:p>
                   </a:txBody>
@@ -6837,7 +6837,7 @@
                           </a:solidFill>
                           <a:latin typeface="Segoe UI"/>
                         </a:rPr>
-                        <a:t>118.0</a:t>
+                        <a:t>242.0</a:t>
                       </a:r>
                     </a:p>
                   </a:txBody>
@@ -6908,7 +6908,7 @@
                           </a:solidFill>
                           <a:latin typeface="Segoe UI"/>
                         </a:rPr>
-                        <a:t>Naucalpan</a:t>
+                        <a:t>Chalco</a:t>
                       </a:r>
                     </a:p>
                   </a:txBody>
@@ -6931,7 +6931,7 @@
                           </a:solidFill>
                           <a:latin typeface="Segoe UI"/>
                         </a:rPr>
-                        <a:t>69.5</a:t>
+                        <a:t>159.0</a:t>
                       </a:r>
                     </a:p>
                   </a:txBody>
@@ -6954,7 +6954,7 @@
                           </a:solidFill>
                           <a:latin typeface="Segoe UI"/>
                         </a:rPr>
-                        <a:t>0.93 km</a:t>
+                        <a:t>0.94 km</a:t>
                       </a:r>
                     </a:p>
                   </a:txBody>
@@ -6977,7 +6977,7 @@
                           </a:solidFill>
                           <a:latin typeface="Segoe UI"/>
                         </a:rPr>
-                        <a:t>103</a:t>
+                        <a:t>297</a:t>
                       </a:r>
                     </a:p>
                   </a:txBody>
@@ -7002,7 +7002,7 @@
                           </a:solidFill>
                           <a:latin typeface="Segoe UI"/>
                         </a:rPr>
-                        <a:t>Chalco</a:t>
+                        <a:t>Toluca</a:t>
                       </a:r>
                     </a:p>
                   </a:txBody>
@@ -7025,7 +7025,7 @@
                           </a:solidFill>
                           <a:latin typeface="Segoe UI"/>
                         </a:rPr>
-                        <a:t>68.0</a:t>
+                        <a:t>113.5</a:t>
                       </a:r>
                     </a:p>
                   </a:txBody>
@@ -7048,7 +7048,7 @@
                           </a:solidFill>
                           <a:latin typeface="Segoe UI"/>
                         </a:rPr>
-                        <a:t>0.94 km</a:t>
+                        <a:t>0.47 km</a:t>
                       </a:r>
                     </a:p>
                   </a:txBody>
@@ -7071,7 +7071,7 @@
                           </a:solidFill>
                           <a:latin typeface="Segoe UI"/>
                         </a:rPr>
-                        <a:t>297</a:t>
+                        <a:t>94</a:t>
                       </a:r>
                     </a:p>
                   </a:txBody>
@@ -7096,7 +7096,7 @@
                           </a:solidFill>
                           <a:latin typeface="Segoe UI"/>
                         </a:rPr>
-                        <a:t>Ecatepec</a:t>
+                        <a:t>La Paz</a:t>
                       </a:r>
                     </a:p>
                   </a:txBody>
@@ -7119,7 +7119,7 @@
                           </a:solidFill>
                           <a:latin typeface="Segoe UI"/>
                         </a:rPr>
-                        <a:t>64.0</a:t>
+                        <a:t>105.5</a:t>
                       </a:r>
                     </a:p>
                   </a:txBody>
@@ -7142,7 +7142,7 @@
                           </a:solidFill>
                           <a:latin typeface="Segoe UI"/>
                         </a:rPr>
-                        <a:t>1.12 km</a:t>
+                        <a:t>0.65 km</a:t>
                       </a:r>
                     </a:p>
                   </a:txBody>
@@ -7165,7 +7165,7 @@
                           </a:solidFill>
                           <a:latin typeface="Segoe UI"/>
                         </a:rPr>
-                        <a:t>698</a:t>
+                        <a:t>149</a:t>
                       </a:r>
                     </a:p>
                   </a:txBody>
@@ -7190,7 +7190,7 @@
                           </a:solidFill>
                           <a:latin typeface="Segoe UI"/>
                         </a:rPr>
-                        <a:t>La Paz</a:t>
+                        <a:t>Valle de Chalco</a:t>
                       </a:r>
                     </a:p>
                   </a:txBody>
@@ -7213,7 +7213,7 @@
                           </a:solidFill>
                           <a:latin typeface="Segoe UI"/>
                         </a:rPr>
-                        <a:t>61.0</a:t>
+                        <a:t>93.0</a:t>
                       </a:r>
                     </a:p>
                   </a:txBody>
@@ -7236,7 +7236,7 @@
                           </a:solidFill>
                           <a:latin typeface="Segoe UI"/>
                         </a:rPr>
-                        <a:t>0.65 km</a:t>
+                        <a:t>1.48 km</a:t>
                       </a:r>
                     </a:p>
                   </a:txBody>
@@ -7259,7 +7259,7 @@
                           </a:solidFill>
                           <a:latin typeface="Segoe UI"/>
                         </a:rPr>
-                        <a:t>149</a:t>
+                        <a:t>203</a:t>
                       </a:r>
                     </a:p>
                   </a:txBody>
@@ -7284,7 +7284,7 @@
                           </a:solidFill>
                           <a:latin typeface="Segoe UI"/>
                         </a:rPr>
-                        <a:t>Ecatepec</a:t>
+                        <a:t>Nezahualcoyotl</a:t>
                       </a:r>
                     </a:p>
                   </a:txBody>
@@ -7307,7 +7307,7 @@
                           </a:solidFill>
                           <a:latin typeface="Segoe UI"/>
                         </a:rPr>
-                        <a:t>59.5</a:t>
+                        <a:t>92.0</a:t>
                       </a:r>
                     </a:p>
                   </a:txBody>
@@ -7330,7 +7330,7 @@
                           </a:solidFill>
                           <a:latin typeface="Segoe UI"/>
                         </a:rPr>
-                        <a:t>0.36 km</a:t>
+                        <a:t>0.25 km</a:t>
                       </a:r>
                     </a:p>
                   </a:txBody>
@@ -7353,7 +7353,7 @@
                           </a:solidFill>
                           <a:latin typeface="Segoe UI"/>
                         </a:rPr>
-                        <a:t>229</a:t>
+                        <a:t>175</a:t>
                       </a:r>
                     </a:p>
                   </a:txBody>
@@ -7378,7 +7378,7 @@
                           </a:solidFill>
                           <a:latin typeface="Segoe UI"/>
                         </a:rPr>
-                        <a:t>Tlalnepantla</a:t>
+                        <a:t>Toluca</a:t>
                       </a:r>
                     </a:p>
                   </a:txBody>
@@ -7401,7 +7401,7 @@
                           </a:solidFill>
                           <a:latin typeface="Segoe UI"/>
                         </a:rPr>
-                        <a:t>57.0</a:t>
+                        <a:t>92.0</a:t>
                       </a:r>
                     </a:p>
                   </a:txBody>
@@ -7424,7 +7424,7 @@
                           </a:solidFill>
                           <a:latin typeface="Segoe UI"/>
                         </a:rPr>
-                        <a:t>0.99 km</a:t>
+                        <a:t>0.8 km</a:t>
                       </a:r>
                     </a:p>
                   </a:txBody>
@@ -7447,7 +7447,7 @@
                           </a:solidFill>
                           <a:latin typeface="Segoe UI"/>
                         </a:rPr>
-                        <a:t>96</a:t>
+                        <a:t>578</a:t>
                       </a:r>
                     </a:p>
                   </a:txBody>
@@ -7472,7 +7472,7 @@
                           </a:solidFill>
                           <a:latin typeface="Segoe UI"/>
                         </a:rPr>
-                        <a:t>Toluca</a:t>
+                        <a:t>Ecatepec</a:t>
                       </a:r>
                     </a:p>
                   </a:txBody>
@@ -7495,7 +7495,7 @@
                           </a:solidFill>
                           <a:latin typeface="Segoe UI"/>
                         </a:rPr>
-                        <a:t>55.5</a:t>
+                        <a:t>91.0</a:t>
                       </a:r>
                     </a:p>
                   </a:txBody>
@@ -7518,7 +7518,7 @@
                           </a:solidFill>
                           <a:latin typeface="Segoe UI"/>
                         </a:rPr>
-                        <a:t>0.47 km</a:t>
+                        <a:t>1.14 km</a:t>
                       </a:r>
                     </a:p>
                   </a:txBody>
@@ -7541,7 +7541,7 @@
                           </a:solidFill>
                           <a:latin typeface="Segoe UI"/>
                         </a:rPr>
-                        <a:t>94</a:t>
+                        <a:t>163</a:t>
                       </a:r>
                     </a:p>
                   </a:txBody>
@@ -7746,7 +7746,7 @@
                 </a:solidFill>
                 <a:latin typeface="Segoe UI"/>
               </a:rPr>
-              <a:t>247 casos auditados · 20 de prioridad alta</a:t>
+              <a:t>487 casos auditados · 37 de prioridad alta</a:t>
             </a:r>
           </a:p>
         </p:txBody>
@@ -8297,7 +8297,7 @@
                           </a:solidFill>
                           <a:latin typeface="Segoe UI"/>
                         </a:rPr>
-                        <a:t>TOL26072506555</a:t>
+                        <a:t>TOL26080407311</a:t>
                       </a:r>
                     </a:p>
                   </a:txBody>
@@ -8320,7 +8320,7 @@
                           </a:solidFill>
                           <a:latin typeface="Segoe UI"/>
                         </a:rPr>
-                        <a:t>Naucalpan</a:t>
+                        <a:t>Zinacantepec</a:t>
                       </a:r>
                     </a:p>
                   </a:txBody>
@@ -8366,7 +8366,7 @@
                           </a:solidFill>
                           <a:latin typeface="Segoe UI"/>
                         </a:rPr>
-                        <a:t>80</a:t>
+                        <a:t>85</a:t>
                       </a:r>
                     </a:p>
                   </a:txBody>
@@ -8389,7 +8389,7 @@
                           </a:solidFill>
                           <a:latin typeface="Segoe UI"/>
                         </a:rPr>
-                        <a:t>El propio catálogo C5 lo clasifica con huellas de violencia; Sangrado o lesiones visibles </a:t>
+                        <a:t>El propio catálogo C5 lo clasifica con huellas de violencia; Indicios de traslado u oculta</a:t>
                       </a:r>
                     </a:p>
                   </a:txBody>
@@ -8414,7 +8414,7 @@
                           </a:solidFill>
                           <a:latin typeface="Segoe UI"/>
                         </a:rPr>
-                        <a:t>ECA26072505767</a:t>
+                        <a:t>TOL26072506555</a:t>
                       </a:r>
                     </a:p>
                   </a:txBody>
@@ -8437,7 +8437,7 @@
                           </a:solidFill>
                           <a:latin typeface="Segoe UI"/>
                         </a:rPr>
-                        <a:t>Ixtapaluca</a:t>
+                        <a:t>Naucalpan</a:t>
                       </a:r>
                     </a:p>
                   </a:txBody>
@@ -8483,7 +8483,7 @@
                           </a:solidFill>
                           <a:latin typeface="Segoe UI"/>
                         </a:rPr>
-                        <a:t>65</a:t>
+                        <a:t>80</a:t>
                       </a:r>
                     </a:p>
                   </a:txBody>
@@ -8531,7 +8531,7 @@
                           </a:solidFill>
                           <a:latin typeface="Segoe UI"/>
                         </a:rPr>
-                        <a:t>ECA26072508203</a:t>
+                        <a:t>ECA26072505767</a:t>
                       </a:r>
                     </a:p>
                   </a:txBody>
@@ -8554,7 +8554,7 @@
                           </a:solidFill>
                           <a:latin typeface="Segoe UI"/>
                         </a:rPr>
-                        <a:t>Chimalhuacan</a:t>
+                        <a:t>Ixtapaluca</a:t>
                       </a:r>
                     </a:p>
                   </a:txBody>
@@ -8577,7 +8577,7 @@
                           </a:solidFill>
                           <a:latin typeface="Segoe UI"/>
                         </a:rPr>
-                        <a:t>Homicidio</a:t>
+                        <a:t>Persona Tirada en la Via Publica con Huellas de Violencia</a:t>
                       </a:r>
                     </a:p>
                   </a:txBody>
@@ -8600,7 +8600,7 @@
                           </a:solidFill>
                           <a:latin typeface="Segoe UI"/>
                         </a:rPr>
-                        <a:t>60</a:t>
+                        <a:t>65</a:t>
                       </a:r>
                     </a:p>
                   </a:txBody>
@@ -8623,7 +8623,7 @@
                           </a:solidFill>
                           <a:latin typeface="Segoe UI"/>
                         </a:rPr>
-                        <a:t>La cabina registra arma de fuego, disparo o impacto; Sangrado o lesiones visibles descrita</a:t>
+                        <a:t>El propio catálogo C5 lo clasifica con huellas de violencia; Sangrado o lesiones visibles </a:t>
                       </a:r>
                     </a:p>
                   </a:txBody>
@@ -8648,7 +8648,7 @@
                           </a:solidFill>
                           <a:latin typeface="Segoe UI"/>
                         </a:rPr>
-                        <a:t>ECA26072606817</a:t>
+                        <a:t>ECA26080201414</a:t>
                       </a:r>
                     </a:p>
                   </a:txBody>
@@ -8671,7 +8671,7 @@
                           </a:solidFill>
                           <a:latin typeface="Segoe UI"/>
                         </a:rPr>
-                        <a:t>Nextlalpan</a:t>
+                        <a:t>Chalco</a:t>
                       </a:r>
                     </a:p>
                   </a:txBody>
@@ -8694,7 +8694,7 @@
                           </a:solidFill>
                           <a:latin typeface="Segoe UI"/>
                         </a:rPr>
-                        <a:t>Persona No Localizada O Desaparecida</a:t>
+                        <a:t>Persona Tirada en Via Publica</a:t>
                       </a:r>
                     </a:p>
                   </a:txBody>
@@ -8717,7 +8717,7 @@
                           </a:solidFill>
                           <a:latin typeface="Segoe UI"/>
                         </a:rPr>
-                        <a:t>60</a:t>
+                        <a:t>65</a:t>
                       </a:r>
                     </a:p>
                   </a:txBody>
@@ -8740,7 +8740,7 @@
                           </a:solidFill>
                           <a:latin typeface="Segoe UI"/>
                         </a:rPr>
-                        <a:t>La cabina registra arma de fuego, disparo o impacto; Participación de terceros referida po</a:t>
+                        <a:t>Indicios de traslado u ocultamiento del cuerpo; Participación de terceros referida por el </a:t>
                       </a:r>
                     </a:p>
                   </a:txBody>
@@ -8765,7 +8765,7 @@
                           </a:solidFill>
                           <a:latin typeface="Segoe UI"/>
                         </a:rPr>
-                        <a:t>ECA26072700675</a:t>
+                        <a:t>ECA26080201520</a:t>
                       </a:r>
                     </a:p>
                   </a:txBody>
@@ -8788,7 +8788,7 @@
                           </a:solidFill>
                           <a:latin typeface="Segoe UI"/>
                         </a:rPr>
-                        <a:t>Tecamac</a:t>
+                        <a:t>Ecatepec</a:t>
                       </a:r>
                     </a:p>
                   </a:txBody>
@@ -8811,7 +8811,7 @@
                           </a:solidFill>
                           <a:latin typeface="Segoe UI"/>
                         </a:rPr>
-                        <a:t>Amenaza de Suicidio</a:t>
+                        <a:t>Persona Tirada en la Via Publica con Huellas de Violencia</a:t>
                       </a:r>
                     </a:p>
                   </a:txBody>
@@ -8834,7 +8834,7 @@
                           </a:solidFill>
                           <a:latin typeface="Segoe UI"/>
                         </a:rPr>
-                        <a:t>55</a:t>
+                        <a:t>65</a:t>
                       </a:r>
                     </a:p>
                   </a:txBody>
@@ -8857,7 +8857,7 @@
                           </a:solidFill>
                           <a:latin typeface="Segoe UI"/>
                         </a:rPr>
-                        <a:t>Antecedente de violencia de pareja o familiar en el propio reporte; Arma blanca o herida p</a:t>
+                        <a:t>El propio catálogo C5 lo clasifica con huellas de violencia; Sangrado o lesiones visibles </a:t>
                       </a:r>
                     </a:p>
                   </a:txBody>
@@ -8882,7 +8882,7 @@
                           </a:solidFill>
                           <a:latin typeface="Segoe UI"/>
                         </a:rPr>
-                        <a:t>TOL26072702143</a:t>
+                        <a:t>ECA26080106718</a:t>
                       </a:r>
                     </a:p>
                   </a:txBody>
@@ -8905,7 +8905,7 @@
                           </a:solidFill>
                           <a:latin typeface="Segoe UI"/>
                         </a:rPr>
-                        <a:t>Naucalpan</a:t>
+                        <a:t>Tlalnepantla</a:t>
                       </a:r>
                     </a:p>
                   </a:txBody>
@@ -8928,7 +8928,7 @@
                           </a:solidFill>
                           <a:latin typeface="Segoe UI"/>
                         </a:rPr>
-                        <a:t>Homicidio</a:t>
+                        <a:t>Persona Tirada en Via Publica</a:t>
                       </a:r>
                     </a:p>
                   </a:txBody>
@@ -8951,7 +8951,7 @@
                           </a:solidFill>
                           <a:latin typeface="Segoe UI"/>
                         </a:rPr>
-                        <a:t>55</a:t>
+                        <a:t>65</a:t>
                       </a:r>
                     </a:p>
                   </a:txBody>
@@ -8974,7 +8974,7 @@
                           </a:solidFill>
                           <a:latin typeface="Segoe UI"/>
                         </a:rPr>
-                        <a:t>Indicios de traslado u ocultamiento del cuerpo; Persona sin signos vitales al arribo; A me</a:t>
+                        <a:t>Indicios de traslado u ocultamiento del cuerpo; Hecho ocurrido en franja nocturna (22:00-0</a:t>
                       </a:r>
                     </a:p>
                   </a:txBody>
@@ -9280,7 +9280,7 @@
                 </a:solidFill>
                 <a:latin typeface="Segoe UI"/>
               </a:rPr>
-              <a:t>Extender cobertura o reasignar cuadrante en los 78 sectores desatendidos, priorizando Naucalpan, Toluca.</a:t>
+              <a:t>Extender cobertura o reasignar cuadrante en los 130 sectores desatendidos, priorizando Naucalpan, Toluca.</a:t>
             </a:r>
           </a:p>
         </p:txBody>
@@ -9358,7 +9358,7 @@
                 </a:solidFill>
                 <a:latin typeface="Segoe UI"/>
               </a:rPr>
-              <a:t>Revisar efectividad y horarios del patrullaje en los 43 sectores saturados, donde ya hay base y personal a menos de 1.5 km.</a:t>
+              <a:t>Revisar efectividad y horarios del patrullaje en los 81 sectores saturados, donde ya hay base y personal a menos de 1.5 km.</a:t>
             </a:r>
           </a:p>
         </p:txBody>
@@ -9436,7 +9436,7 @@
                 </a:solidFill>
                 <a:latin typeface="Segoe UI"/>
               </a:rPr>
-              <a:t>Solicitar a la FGJEM las carpetas de los 20 casos de prioridad alta y turnarlos a Criminalística.</a:t>
+              <a:t>Solicitar a la FGJEM las carpetas de los 37 casos de prioridad alta y turnarlos a Criminalística.</a:t>
             </a:r>
           </a:p>
         </p:txBody>
@@ -9514,7 +9514,7 @@
                 </a:solidFill>
                 <a:latin typeface="Segoe UI"/>
               </a:rPr>
-              <a:t>Instruir a cabina C5 la captura obligatoria del campo de referencia de ubicación: es lo que permite recuperar el 96.3% de las llamadas con violencia que llegan sin coordenada.</a:t>
+              <a:t>Instruir a cabina C5 la captura obligatoria del campo de referencia de ubicación: es lo que permite recuperar el 97.8% de las llamadas con violencia que llegan sin coordenada.</a:t>
             </a:r>
           </a:p>
         </p:txBody>

--- a/presentacion/SIGEO-HD_Reunion_Mandos.pptx
+++ b/presentacion/SIGEO-HD_Reunion_Mandos.pptx
@@ -3210,7 +3210,7 @@
                 </a:solidFill>
                 <a:latin typeface="Segoe UI"/>
               </a:rPr>
-              <a:t>Análisis de corte · Julio 2026</a:t>
+              <a:t>Análisis de corte · Enero–agosto de 2026</a:t>
             </a:r>
           </a:p>
         </p:txBody>
@@ -3304,7 +3304,7 @@
                 </a:solidFill>
                 <a:latin typeface="Segoe UI"/>
               </a:rPr>
-              <a:t>Documento de trabajo interno · generado 2026-08-08 20:19 · cifras sin validar por las áreas responsables</a:t>
+              <a:t>Documento de trabajo interno · generado 2026-08-11 09:30 · cifras sin validar por las áreas responsables</a:t>
             </a:r>
           </a:p>
         </p:txBody>
@@ -3444,7 +3444,7 @@
                 </a:solidFill>
                 <a:latin typeface="Segoe UI"/>
               </a:rPr>
-              <a:t>218 horas de operación C5 · 36,672 llamadas · 27 municipios con homicidio</a:t>
+              <a:t>218 horas de operación C5 · 36,672 llamadas · 78 municipios con homicidio</a:t>
             </a:r>
           </a:p>
         </p:txBody>
@@ -3609,7 +3609,7 @@
                 </a:solidFill>
                 <a:latin typeface="Segoe UI"/>
               </a:rPr>
-              <a:t>56</a:t>
+              <a:t>560</a:t>
             </a:r>
           </a:p>
         </p:txBody>
@@ -3648,7 +3648,7 @@
                 </a:solidFill>
                 <a:latin typeface="Segoe UI"/>
               </a:rPr>
-              <a:t>63 víctimas fatales</a:t>
+              <a:t>617 víctimas fatales</a:t>
             </a:r>
           </a:p>
         </p:txBody>
@@ -3774,7 +3774,7 @@
                 </a:solidFill>
                 <a:latin typeface="Segoe UI"/>
               </a:rPr>
-              <a:t>31</a:t>
+              <a:t>263</a:t>
             </a:r>
           </a:p>
         </p:txBody>
@@ -3813,7 +3813,7 @@
                 </a:solidFill>
                 <a:latin typeface="Segoe UI"/>
               </a:rPr>
-              <a:t>55% entre 22:00 y 06:00</a:t>
+              <a:t>47% entre 22:00 y 06:00</a:t>
             </a:r>
           </a:p>
         </p:txBody>
@@ -3939,7 +3939,7 @@
                 </a:solidFill>
                 <a:latin typeface="Segoe UI"/>
               </a:rPr>
-              <a:t>1.9 km</a:t>
+              <a:t>2.39 km</a:t>
             </a:r>
           </a:p>
         </p:txBody>
@@ -3978,7 +3978,7 @@
                 </a:solidFill>
                 <a:latin typeface="Segoe UI"/>
               </a:rPr>
-              <a:t>mediana · 14 a más de 3 km</a:t>
+              <a:t>mediana · 211 a más de 3 km</a:t>
             </a:r>
           </a:p>
         </p:txBody>
@@ -4616,7 +4616,7 @@
                           </a:solidFill>
                           <a:latin typeface="Segoe UI"/>
                         </a:rPr>
-                        <a:t>17</a:t>
+                        <a:t>177</a:t>
                       </a:r>
                     </a:p>
                   </a:txBody>
@@ -4662,7 +4662,7 @@
                           </a:solidFill>
                           <a:latin typeface="Segoe UI"/>
                         </a:rPr>
-                        <a:t>118.4</a:t>
+                        <a:t>219.0</a:t>
                       </a:r>
                     </a:p>
                   </a:txBody>
@@ -4687,7 +4687,7 @@
                           </a:solidFill>
                           <a:latin typeface="Segoe UI"/>
                         </a:rPr>
-                        <a:t>Valle Toluca</a:t>
+                        <a:t>Ecatepec</a:t>
                       </a:r>
                     </a:p>
                   </a:txBody>
@@ -4710,7 +4710,7 @@
                           </a:solidFill>
                           <a:latin typeface="Segoe UI"/>
                         </a:rPr>
-                        <a:t>16</a:t>
+                        <a:t>15</a:t>
                       </a:r>
                     </a:p>
                   </a:txBody>
@@ -4733,7 +4733,7 @@
                           </a:solidFill>
                           <a:latin typeface="Segoe UI"/>
                         </a:rPr>
-                        <a:t>1</a:t>
+                        <a:t>163</a:t>
                       </a:r>
                     </a:p>
                   </a:txBody>
@@ -4756,7 +4756,7 @@
                           </a:solidFill>
                           <a:latin typeface="Segoe UI"/>
                         </a:rPr>
-                        <a:t>1,498</a:t>
+                        <a:t>1,841</a:t>
                       </a:r>
                     </a:p>
                   </a:txBody>
@@ -4779,7 +4779,7 @@
                           </a:solidFill>
                           <a:latin typeface="Segoe UI"/>
                         </a:rPr>
-                        <a:t>105.5</a:t>
+                        <a:t>162.0</a:t>
                       </a:r>
                     </a:p>
                   </a:txBody>
@@ -4804,7 +4804,7 @@
                           </a:solidFill>
                           <a:latin typeface="Segoe UI"/>
                         </a:rPr>
-                        <a:t>Ecatepec</a:t>
+                        <a:t>Oriente</a:t>
                       </a:r>
                     </a:p>
                   </a:txBody>
@@ -4827,7 +4827,7 @@
                           </a:solidFill>
                           <a:latin typeface="Segoe UI"/>
                         </a:rPr>
-                        <a:t>15</a:t>
+                        <a:t>17</a:t>
                       </a:r>
                     </a:p>
                   </a:txBody>
@@ -4850,7 +4850,7 @@
                           </a:solidFill>
                           <a:latin typeface="Segoe UI"/>
                         </a:rPr>
-                        <a:t>20</a:t>
+                        <a:t>102</a:t>
                       </a:r>
                     </a:p>
                   </a:txBody>
@@ -4873,7 +4873,7 @@
                           </a:solidFill>
                           <a:latin typeface="Segoe UI"/>
                         </a:rPr>
-                        <a:t>1,841</a:t>
+                        <a:t>2,047</a:t>
                       </a:r>
                     </a:p>
                   </a:txBody>
@@ -4896,7 +4896,7 @@
                           </a:solidFill>
                           <a:latin typeface="Segoe UI"/>
                         </a:rPr>
-                        <a:t>84.3</a:t>
+                        <a:t>99.8</a:t>
                       </a:r>
                     </a:p>
                   </a:txBody>
@@ -4921,7 +4921,7 @@
                           </a:solidFill>
                           <a:latin typeface="Segoe UI"/>
                         </a:rPr>
-                        <a:t>Oriente</a:t>
+                        <a:t>Valle Toluca</a:t>
                       </a:r>
                     </a:p>
                   </a:txBody>
@@ -4944,7 +4944,7 @@
                           </a:solidFill>
                           <a:latin typeface="Segoe UI"/>
                         </a:rPr>
-                        <a:t>17</a:t>
+                        <a:t>16</a:t>
                       </a:r>
                     </a:p>
                   </a:txBody>
@@ -4967,7 +4967,7 @@
                           </a:solidFill>
                           <a:latin typeface="Segoe UI"/>
                         </a:rPr>
-                        <a:t>12</a:t>
+                        <a:t>26</a:t>
                       </a:r>
                     </a:p>
                   </a:txBody>
@@ -4990,7 +4990,7 @@
                           </a:solidFill>
                           <a:latin typeface="Segoe UI"/>
                         </a:rPr>
-                        <a:t>2,047</a:t>
+                        <a:t>1,498</a:t>
                       </a:r>
                     </a:p>
                   </a:txBody>
@@ -5013,7 +5013,7 @@
                           </a:solidFill>
                           <a:latin typeface="Segoe UI"/>
                         </a:rPr>
-                        <a:t>55.8</a:t>
+                        <a:t>122.2</a:t>
                       </a:r>
                     </a:p>
                   </a:txBody>
@@ -5084,7 +5084,7 @@
                           </a:solidFill>
                           <a:latin typeface="Segoe UI"/>
                         </a:rPr>
-                        <a:t>2</a:t>
+                        <a:t>49</a:t>
                       </a:r>
                     </a:p>
                   </a:txBody>
@@ -5130,7 +5130,7 @@
                           </a:solidFill>
                           <a:latin typeface="Segoe UI"/>
                         </a:rPr>
-                        <a:t>38.7</a:t>
+                        <a:t>66.4</a:t>
                       </a:r>
                     </a:p>
                   </a:txBody>
@@ -5201,7 +5201,7 @@
                           </a:solidFill>
                           <a:latin typeface="Segoe UI"/>
                         </a:rPr>
-                        <a:t>1</a:t>
+                        <a:t>19</a:t>
                       </a:r>
                     </a:p>
                   </a:txBody>
@@ -5247,7 +5247,7 @@
                           </a:solidFill>
                           <a:latin typeface="Segoe UI"/>
                         </a:rPr>
-                        <a:t>33.2</a:t>
+                        <a:t>56.3</a:t>
                       </a:r>
                     </a:p>
                   </a:txBody>
@@ -5318,7 +5318,7 @@
                           </a:solidFill>
                           <a:latin typeface="Segoe UI"/>
                         </a:rPr>
-                        <a:t>2</a:t>
+                        <a:t>19</a:t>
                       </a:r>
                     </a:p>
                   </a:txBody>
@@ -5364,7 +5364,7 @@
                           </a:solidFill>
                           <a:latin typeface="Segoe UI"/>
                         </a:rPr>
-                        <a:t>25.0</a:t>
+                        <a:t>44.4</a:t>
                       </a:r>
                     </a:p>
                   </a:txBody>
@@ -5412,7 +5412,7 @@
                           </a:solidFill>
                           <a:latin typeface="Segoe UI"/>
                         </a:rPr>
-                        <a:t>11</a:t>
+                        <a:t>12</a:t>
                       </a:r>
                     </a:p>
                   </a:txBody>
@@ -5435,7 +5435,7 @@
                           </a:solidFill>
                           <a:latin typeface="Segoe UI"/>
                         </a:rPr>
-                        <a:t>1</a:t>
+                        <a:t>5</a:t>
                       </a:r>
                     </a:p>
                   </a:txBody>
@@ -5481,7 +5481,7 @@
                           </a:solidFill>
                           <a:latin typeface="Segoe UI"/>
                         </a:rPr>
-                        <a:t>26.4</a:t>
+                        <a:t>35.4</a:t>
                       </a:r>
                     </a:p>
                   </a:txBody>
@@ -5686,7 +5686,7 @@
                 </a:solidFill>
                 <a:latin typeface="Segoe UI"/>
               </a:rPr>
-              <a:t>489 sectores con violencia registrada · 130 desatendidos · 81 saturados</a:t>
+              <a:t>604 sectores con violencia registrada · 227 desatendidos · 95 saturados</a:t>
             </a:r>
           </a:p>
         </p:txBody>
@@ -5924,7 +5924,7 @@
                           </a:solidFill>
                           <a:latin typeface="Segoe UI"/>
                         </a:rPr>
-                        <a:t>263.7</a:t>
+                        <a:t>336.2</a:t>
                       </a:r>
                     </a:p>
                   </a:txBody>
@@ -5947,7 +5947,7 @@
                           </a:solidFill>
                           <a:latin typeface="Segoe UI"/>
                         </a:rPr>
-                        <a:t>3.36 km</a:t>
+                        <a:t>4.59 km</a:t>
                       </a:r>
                     </a:p>
                   </a:txBody>
@@ -5995,7 +5995,7 @@
                           </a:solidFill>
                           <a:latin typeface="Segoe UI"/>
                         </a:rPr>
-                        <a:t>Toluca</a:t>
+                        <a:t>Tultepec</a:t>
                       </a:r>
                     </a:p>
                   </a:txBody>
@@ -6018,7 +6018,7 @@
                           </a:solidFill>
                           <a:latin typeface="Segoe UI"/>
                         </a:rPr>
-                        <a:t>240.0</a:t>
+                        <a:t>326.0</a:t>
                       </a:r>
                     </a:p>
                   </a:txBody>
@@ -6041,7 +6041,7 @@
                           </a:solidFill>
                           <a:latin typeface="Segoe UI"/>
                         </a:rPr>
-                        <a:t>6.48 km</a:t>
+                        <a:t>5.21 km</a:t>
                       </a:r>
                     </a:p>
                   </a:txBody>
@@ -6089,7 +6089,7 @@
                           </a:solidFill>
                           <a:latin typeface="Segoe UI"/>
                         </a:rPr>
-                        <a:t>Naucalpan</a:t>
+                        <a:t>Teoloyucan</a:t>
                       </a:r>
                     </a:p>
                   </a:txBody>
@@ -6112,7 +6112,7 @@
                           </a:solidFill>
                           <a:latin typeface="Segoe UI"/>
                         </a:rPr>
-                        <a:t>237.3</a:t>
+                        <a:t>320.1</a:t>
                       </a:r>
                     </a:p>
                   </a:txBody>
@@ -6135,7 +6135,7 @@
                           </a:solidFill>
                           <a:latin typeface="Segoe UI"/>
                         </a:rPr>
-                        <a:t>4.59 km</a:t>
+                        <a:t>3.74 km</a:t>
                       </a:r>
                     </a:p>
                   </a:txBody>
@@ -6183,7 +6183,7 @@
                           </a:solidFill>
                           <a:latin typeface="Segoe UI"/>
                         </a:rPr>
-                        <a:t>Toluca</a:t>
+                        <a:t>Naucalpan</a:t>
                       </a:r>
                     </a:p>
                   </a:txBody>
@@ -6206,7 +6206,7 @@
                           </a:solidFill>
                           <a:latin typeface="Segoe UI"/>
                         </a:rPr>
-                        <a:t>221.0</a:t>
+                        <a:t>317.3</a:t>
                       </a:r>
                     </a:p>
                   </a:txBody>
@@ -6229,7 +6229,7 @@
                           </a:solidFill>
                           <a:latin typeface="Segoe UI"/>
                         </a:rPr>
-                        <a:t>4.14 km</a:t>
+                        <a:t>3.36 km</a:t>
                       </a:r>
                     </a:p>
                   </a:txBody>
@@ -6277,7 +6277,7 @@
                           </a:solidFill>
                           <a:latin typeface="Segoe UI"/>
                         </a:rPr>
-                        <a:t>Toluca</a:t>
+                        <a:t>Cuautitlan Izcalli</a:t>
                       </a:r>
                     </a:p>
                   </a:txBody>
@@ -6300,7 +6300,7 @@
                           </a:solidFill>
                           <a:latin typeface="Segoe UI"/>
                         </a:rPr>
-                        <a:t>204.7</a:t>
+                        <a:t>297.4</a:t>
                       </a:r>
                     </a:p>
                   </a:txBody>
@@ -6323,7 +6323,7 @@
                           </a:solidFill>
                           <a:latin typeface="Segoe UI"/>
                         </a:rPr>
-                        <a:t>4.25 km</a:t>
+                        <a:t>3.92 km</a:t>
                       </a:r>
                     </a:p>
                   </a:txBody>
@@ -6371,7 +6371,7 @@
                           </a:solidFill>
                           <a:latin typeface="Segoe UI"/>
                         </a:rPr>
-                        <a:t>Valle de Chalco</a:t>
+                        <a:t>Chicoloapan</a:t>
                       </a:r>
                     </a:p>
                   </a:txBody>
@@ -6394,7 +6394,7 @@
                           </a:solidFill>
                           <a:latin typeface="Segoe UI"/>
                         </a:rPr>
-                        <a:t>180.8</a:t>
+                        <a:t>276.3</a:t>
                       </a:r>
                     </a:p>
                   </a:txBody>
@@ -6417,7 +6417,7 @@
                           </a:solidFill>
                           <a:latin typeface="Segoe UI"/>
                         </a:rPr>
-                        <a:t>3.02 km</a:t>
+                        <a:t>3.82 km</a:t>
                       </a:r>
                     </a:p>
                   </a:txBody>
@@ -6465,7 +6465,7 @@
                           </a:solidFill>
                           <a:latin typeface="Segoe UI"/>
                         </a:rPr>
-                        <a:t>Ecatepec</a:t>
+                        <a:t>Toluca</a:t>
                       </a:r>
                     </a:p>
                   </a:txBody>
@@ -6488,7 +6488,7 @@
                           </a:solidFill>
                           <a:latin typeface="Segoe UI"/>
                         </a:rPr>
-                        <a:t>164.7</a:t>
+                        <a:t>240.0</a:t>
                       </a:r>
                     </a:p>
                   </a:txBody>
@@ -6511,7 +6511,7 @@
                           </a:solidFill>
                           <a:latin typeface="Segoe UI"/>
                         </a:rPr>
-                        <a:t>3.49 km</a:t>
+                        <a:t>6.48 km</a:t>
                       </a:r>
                     </a:p>
                   </a:txBody>
@@ -6559,7 +6559,7 @@
                           </a:solidFill>
                           <a:latin typeface="Segoe UI"/>
                         </a:rPr>
-                        <a:t>Cuautitlan Izcalli</a:t>
+                        <a:t>Ecatepec</a:t>
                       </a:r>
                     </a:p>
                   </a:txBody>
@@ -6582,7 +6582,7 @@
                           </a:solidFill>
                           <a:latin typeface="Segoe UI"/>
                         </a:rPr>
-                        <a:t>149.5</a:t>
+                        <a:t>225.0</a:t>
                       </a:r>
                     </a:p>
                   </a:txBody>
@@ -6605,7 +6605,7 @@
                           </a:solidFill>
                           <a:latin typeface="Segoe UI"/>
                         </a:rPr>
-                        <a:t>3.92 km</a:t>
+                        <a:t>3.06 km</a:t>
                       </a:r>
                     </a:p>
                   </a:txBody>
@@ -6837,7 +6837,7 @@
                           </a:solidFill>
                           <a:latin typeface="Segoe UI"/>
                         </a:rPr>
-                        <a:t>242.0</a:t>
+                        <a:t>252.0</a:t>
                       </a:r>
                     </a:p>
                   </a:txBody>
@@ -6908,7 +6908,7 @@
                           </a:solidFill>
                           <a:latin typeface="Segoe UI"/>
                         </a:rPr>
-                        <a:t>Chalco</a:t>
+                        <a:t>La Paz</a:t>
                       </a:r>
                     </a:p>
                   </a:txBody>
@@ -6931,7 +6931,7 @@
                           </a:solidFill>
                           <a:latin typeface="Segoe UI"/>
                         </a:rPr>
-                        <a:t>159.0</a:t>
+                        <a:t>175.5</a:t>
                       </a:r>
                     </a:p>
                   </a:txBody>
@@ -6954,7 +6954,7 @@
                           </a:solidFill>
                           <a:latin typeface="Segoe UI"/>
                         </a:rPr>
-                        <a:t>0.94 km</a:t>
+                        <a:t>0.65 km</a:t>
                       </a:r>
                     </a:p>
                   </a:txBody>
@@ -6977,7 +6977,7 @@
                           </a:solidFill>
                           <a:latin typeface="Segoe UI"/>
                         </a:rPr>
-                        <a:t>297</a:t>
+                        <a:t>149</a:t>
                       </a:r>
                     </a:p>
                   </a:txBody>
@@ -7002,7 +7002,7 @@
                           </a:solidFill>
                           <a:latin typeface="Segoe UI"/>
                         </a:rPr>
-                        <a:t>Toluca</a:t>
+                        <a:t>Cuautitlan Izcalli</a:t>
                       </a:r>
                     </a:p>
                   </a:txBody>
@@ -7025,7 +7025,7 @@
                           </a:solidFill>
                           <a:latin typeface="Segoe UI"/>
                         </a:rPr>
-                        <a:t>113.5</a:t>
+                        <a:t>172.0</a:t>
                       </a:r>
                     </a:p>
                   </a:txBody>
@@ -7048,7 +7048,7 @@
                           </a:solidFill>
                           <a:latin typeface="Segoe UI"/>
                         </a:rPr>
-                        <a:t>0.47 km</a:t>
+                        <a:t>0.99 km</a:t>
                       </a:r>
                     </a:p>
                   </a:txBody>
@@ -7071,7 +7071,7 @@
                           </a:solidFill>
                           <a:latin typeface="Segoe UI"/>
                         </a:rPr>
-                        <a:t>94</a:t>
+                        <a:t>96</a:t>
                       </a:r>
                     </a:p>
                   </a:txBody>
@@ -7096,7 +7096,7 @@
                           </a:solidFill>
                           <a:latin typeface="Segoe UI"/>
                         </a:rPr>
-                        <a:t>La Paz</a:t>
+                        <a:t>Chalco</a:t>
                       </a:r>
                     </a:p>
                   </a:txBody>
@@ -7119,7 +7119,7 @@
                           </a:solidFill>
                           <a:latin typeface="Segoe UI"/>
                         </a:rPr>
-                        <a:t>105.5</a:t>
+                        <a:t>169.0</a:t>
                       </a:r>
                     </a:p>
                   </a:txBody>
@@ -7142,7 +7142,7 @@
                           </a:solidFill>
                           <a:latin typeface="Segoe UI"/>
                         </a:rPr>
-                        <a:t>0.65 km</a:t>
+                        <a:t>0.94 km</a:t>
                       </a:r>
                     </a:p>
                   </a:txBody>
@@ -7165,7 +7165,7 @@
                           </a:solidFill>
                           <a:latin typeface="Segoe UI"/>
                         </a:rPr>
-                        <a:t>149</a:t>
+                        <a:t>297</a:t>
                       </a:r>
                     </a:p>
                   </a:txBody>
@@ -7213,7 +7213,7 @@
                           </a:solidFill>
                           <a:latin typeface="Segoe UI"/>
                         </a:rPr>
-                        <a:t>93.0</a:t>
+                        <a:t>123.0</a:t>
                       </a:r>
                     </a:p>
                   </a:txBody>
@@ -7284,7 +7284,7 @@
                           </a:solidFill>
                           <a:latin typeface="Segoe UI"/>
                         </a:rPr>
-                        <a:t>Nezahualcoyotl</a:t>
+                        <a:t>Ecatepec</a:t>
                       </a:r>
                     </a:p>
                   </a:txBody>
@@ -7307,7 +7307,7 @@
                           </a:solidFill>
                           <a:latin typeface="Segoe UI"/>
                         </a:rPr>
-                        <a:t>92.0</a:t>
+                        <a:t>122.0</a:t>
                       </a:r>
                     </a:p>
                   </a:txBody>
@@ -7330,7 +7330,7 @@
                           </a:solidFill>
                           <a:latin typeface="Segoe UI"/>
                         </a:rPr>
-                        <a:t>0.25 km</a:t>
+                        <a:t>0.36 km</a:t>
                       </a:r>
                     </a:p>
                   </a:txBody>
@@ -7353,7 +7353,7 @@
                           </a:solidFill>
                           <a:latin typeface="Segoe UI"/>
                         </a:rPr>
-                        <a:t>175</a:t>
+                        <a:t>229</a:t>
                       </a:r>
                     </a:p>
                   </a:txBody>
@@ -7378,7 +7378,7 @@
                           </a:solidFill>
                           <a:latin typeface="Segoe UI"/>
                         </a:rPr>
-                        <a:t>Toluca</a:t>
+                        <a:t>Ecatepec</a:t>
                       </a:r>
                     </a:p>
                   </a:txBody>
@@ -7401,7 +7401,7 @@
                           </a:solidFill>
                           <a:latin typeface="Segoe UI"/>
                         </a:rPr>
-                        <a:t>92.0</a:t>
+                        <a:t>121.0</a:t>
                       </a:r>
                     </a:p>
                   </a:txBody>
@@ -7424,7 +7424,7 @@
                           </a:solidFill>
                           <a:latin typeface="Segoe UI"/>
                         </a:rPr>
-                        <a:t>0.8 km</a:t>
+                        <a:t>1.14 km</a:t>
                       </a:r>
                     </a:p>
                   </a:txBody>
@@ -7447,7 +7447,7 @@
                           </a:solidFill>
                           <a:latin typeface="Segoe UI"/>
                         </a:rPr>
-                        <a:t>578</a:t>
+                        <a:t>163</a:t>
                       </a:r>
                     </a:p>
                   </a:txBody>
@@ -7495,7 +7495,7 @@
                           </a:solidFill>
                           <a:latin typeface="Segoe UI"/>
                         </a:rPr>
-                        <a:t>91.0</a:t>
+                        <a:t>115.5</a:t>
                       </a:r>
                     </a:p>
                   </a:txBody>
@@ -7518,7 +7518,7 @@
                           </a:solidFill>
                           <a:latin typeface="Segoe UI"/>
                         </a:rPr>
-                        <a:t>1.14 km</a:t>
+                        <a:t>1.17 km</a:t>
                       </a:r>
                     </a:p>
                   </a:txBody>
@@ -7541,7 +7541,7 @@
                           </a:solidFill>
                           <a:latin typeface="Segoe UI"/>
                         </a:rPr>
-                        <a:t>163</a:t>
+                        <a:t>99</a:t>
                       </a:r>
                     </a:p>
                   </a:txBody>
@@ -7746,7 +7746,7 @@
                 </a:solidFill>
                 <a:latin typeface="Segoe UI"/>
               </a:rPr>
-              <a:t>487 casos auditados · 37 de prioridad alta</a:t>
+              <a:t>487 casos auditados · 64 de prioridad alta</a:t>
             </a:r>
           </a:p>
         </p:txBody>
@@ -8015,7 +8015,7 @@
                           </a:solidFill>
                           <a:latin typeface="Segoe UI"/>
                         </a:rPr>
-                        <a:t>105</a:t>
+                        <a:t>125</a:t>
                       </a:r>
                     </a:p>
                   </a:txBody>
@@ -8297,7 +8297,7 @@
                           </a:solidFill>
                           <a:latin typeface="Segoe UI"/>
                         </a:rPr>
-                        <a:t>TOL26080407311</a:t>
+                        <a:t>ECA26080201414</a:t>
                       </a:r>
                     </a:p>
                   </a:txBody>
@@ -8320,7 +8320,7 @@
                           </a:solidFill>
                           <a:latin typeface="Segoe UI"/>
                         </a:rPr>
-                        <a:t>Zinacantepec</a:t>
+                        <a:t>Chalco</a:t>
                       </a:r>
                     </a:p>
                   </a:txBody>
@@ -8343,7 +8343,7 @@
                           </a:solidFill>
                           <a:latin typeface="Segoe UI"/>
                         </a:rPr>
-                        <a:t>Persona Tirada en la Via Publica con Huellas de Violencia</a:t>
+                        <a:t>Persona Tirada en Via Publica</a:t>
                       </a:r>
                     </a:p>
                   </a:txBody>
@@ -8389,7 +8389,7 @@
                           </a:solidFill>
                           <a:latin typeface="Segoe UI"/>
                         </a:rPr>
-                        <a:t>El propio catálogo C5 lo clasifica con huellas de violencia; Indicios de traslado u oculta</a:t>
+                        <a:t>Indicios de traslado u ocultamiento del cuerpo; Participación de terceros referida por el </a:t>
                       </a:r>
                     </a:p>
                   </a:txBody>
@@ -8414,7 +8414,7 @@
                           </a:solidFill>
                           <a:latin typeface="Segoe UI"/>
                         </a:rPr>
-                        <a:t>TOL26072506555</a:t>
+                        <a:t>ECA26080201520</a:t>
                       </a:r>
                     </a:p>
                   </a:txBody>
@@ -8437,7 +8437,7 @@
                           </a:solidFill>
                           <a:latin typeface="Segoe UI"/>
                         </a:rPr>
-                        <a:t>Naucalpan</a:t>
+                        <a:t>Ecatepec</a:t>
                       </a:r>
                     </a:p>
                   </a:txBody>
@@ -8483,7 +8483,7 @@
                           </a:solidFill>
                           <a:latin typeface="Segoe UI"/>
                         </a:rPr>
-                        <a:t>80</a:t>
+                        <a:t>85</a:t>
                       </a:r>
                     </a:p>
                   </a:txBody>
@@ -8531,7 +8531,7 @@
                           </a:solidFill>
                           <a:latin typeface="Segoe UI"/>
                         </a:rPr>
-                        <a:t>ECA26072505767</a:t>
+                        <a:t>TOL26080407311</a:t>
                       </a:r>
                     </a:p>
                   </a:txBody>
@@ -8554,7 +8554,7 @@
                           </a:solidFill>
                           <a:latin typeface="Segoe UI"/>
                         </a:rPr>
-                        <a:t>Ixtapaluca</a:t>
+                        <a:t>Zinacantepec</a:t>
                       </a:r>
                     </a:p>
                   </a:txBody>
@@ -8600,7 +8600,7 @@
                           </a:solidFill>
                           <a:latin typeface="Segoe UI"/>
                         </a:rPr>
-                        <a:t>65</a:t>
+                        <a:t>85</a:t>
                       </a:r>
                     </a:p>
                   </a:txBody>
@@ -8623,7 +8623,7 @@
                           </a:solidFill>
                           <a:latin typeface="Segoe UI"/>
                         </a:rPr>
-                        <a:t>El propio catálogo C5 lo clasifica con huellas de violencia; Sangrado o lesiones visibles </a:t>
+                        <a:t>El propio catálogo C5 lo clasifica con huellas de violencia; Indicios de traslado u oculta</a:t>
                       </a:r>
                     </a:p>
                   </a:txBody>
@@ -8648,7 +8648,7 @@
                           </a:solidFill>
                           <a:latin typeface="Segoe UI"/>
                         </a:rPr>
-                        <a:t>ECA26080201414</a:t>
+                        <a:t>TOL26072506555</a:t>
                       </a:r>
                     </a:p>
                   </a:txBody>
@@ -8671,7 +8671,7 @@
                           </a:solidFill>
                           <a:latin typeface="Segoe UI"/>
                         </a:rPr>
-                        <a:t>Chalco</a:t>
+                        <a:t>Naucalpan</a:t>
                       </a:r>
                     </a:p>
                   </a:txBody>
@@ -8694,7 +8694,7 @@
                           </a:solidFill>
                           <a:latin typeface="Segoe UI"/>
                         </a:rPr>
-                        <a:t>Persona Tirada en Via Publica</a:t>
+                        <a:t>Persona Tirada en la Via Publica con Huellas de Violencia</a:t>
                       </a:r>
                     </a:p>
                   </a:txBody>
@@ -8717,7 +8717,7 @@
                           </a:solidFill>
                           <a:latin typeface="Segoe UI"/>
                         </a:rPr>
-                        <a:t>65</a:t>
+                        <a:t>80</a:t>
                       </a:r>
                     </a:p>
                   </a:txBody>
@@ -8740,7 +8740,7 @@
                           </a:solidFill>
                           <a:latin typeface="Segoe UI"/>
                         </a:rPr>
-                        <a:t>Indicios de traslado u ocultamiento del cuerpo; Participación de terceros referida por el </a:t>
+                        <a:t>El propio catálogo C5 lo clasifica con huellas de violencia; Sangrado o lesiones visibles </a:t>
                       </a:r>
                     </a:p>
                   </a:txBody>
@@ -8765,7 +8765,7 @@
                           </a:solidFill>
                           <a:latin typeface="Segoe UI"/>
                         </a:rPr>
-                        <a:t>ECA26080201520</a:t>
+                        <a:t>ECA26072508203</a:t>
                       </a:r>
                     </a:p>
                   </a:txBody>
@@ -8788,7 +8788,7 @@
                           </a:solidFill>
                           <a:latin typeface="Segoe UI"/>
                         </a:rPr>
-                        <a:t>Ecatepec</a:t>
+                        <a:t>Chimalhuacan</a:t>
                       </a:r>
                     </a:p>
                   </a:txBody>
@@ -8811,7 +8811,7 @@
                           </a:solidFill>
                           <a:latin typeface="Segoe UI"/>
                         </a:rPr>
-                        <a:t>Persona Tirada en la Via Publica con Huellas de Violencia</a:t>
+                        <a:t>Homicidio</a:t>
                       </a:r>
                     </a:p>
                   </a:txBody>
@@ -8834,7 +8834,7 @@
                           </a:solidFill>
                           <a:latin typeface="Segoe UI"/>
                         </a:rPr>
-                        <a:t>65</a:t>
+                        <a:t>80</a:t>
                       </a:r>
                     </a:p>
                   </a:txBody>
@@ -8857,7 +8857,7 @@
                           </a:solidFill>
                           <a:latin typeface="Segoe UI"/>
                         </a:rPr>
-                        <a:t>El propio catálogo C5 lo clasifica con huellas de violencia; Sangrado o lesiones visibles </a:t>
+                        <a:t>La cabina registra arma de fuego, disparo o impacto; Sangrado o lesiones visibles descrita</a:t>
                       </a:r>
                     </a:p>
                   </a:txBody>
@@ -8882,7 +8882,7 @@
                           </a:solidFill>
                           <a:latin typeface="Segoe UI"/>
                         </a:rPr>
-                        <a:t>ECA26080106718</a:t>
+                        <a:t>ECA26072707150</a:t>
                       </a:r>
                     </a:p>
                   </a:txBody>
@@ -8905,7 +8905,7 @@
                           </a:solidFill>
                           <a:latin typeface="Segoe UI"/>
                         </a:rPr>
-                        <a:t>Tlalnepantla</a:t>
+                        <a:t>Chimalhuacan</a:t>
                       </a:r>
                     </a:p>
                   </a:txBody>
@@ -8928,7 +8928,7 @@
                           </a:solidFill>
                           <a:latin typeface="Segoe UI"/>
                         </a:rPr>
-                        <a:t>Persona Tirada en Via Publica</a:t>
+                        <a:t>Persona Tirada en la Via Publica con Huellas de Violencia</a:t>
                       </a:r>
                     </a:p>
                   </a:txBody>
@@ -8951,7 +8951,7 @@
                           </a:solidFill>
                           <a:latin typeface="Segoe UI"/>
                         </a:rPr>
-                        <a:t>65</a:t>
+                        <a:t>80</a:t>
                       </a:r>
                     </a:p>
                   </a:txBody>
@@ -8974,7 +8974,7 @@
                           </a:solidFill>
                           <a:latin typeface="Segoe UI"/>
                         </a:rPr>
-                        <a:t>Indicios de traslado u ocultamiento del cuerpo; Hecho ocurrido en franja nocturna (22:00-0</a:t>
+                        <a:t>El propio catálogo C5 lo clasifica con huellas de violencia; Sangrado o lesiones visibles </a:t>
                       </a:r>
                     </a:p>
                   </a:txBody>
@@ -9280,7 +9280,7 @@
                 </a:solidFill>
                 <a:latin typeface="Segoe UI"/>
               </a:rPr>
-              <a:t>Extender cobertura o reasignar cuadrante en los 130 sectores desatendidos, priorizando Naucalpan, Toluca.</a:t>
+              <a:t>Extender cobertura o reasignar cuadrante en los 227 sectores desatendidos, priorizando Naucalpan, Tultepec, Teoloyucan.</a:t>
             </a:r>
           </a:p>
         </p:txBody>
@@ -9358,7 +9358,7 @@
                 </a:solidFill>
                 <a:latin typeface="Segoe UI"/>
               </a:rPr>
-              <a:t>Revisar efectividad y horarios del patrullaje en los 81 sectores saturados, donde ya hay base y personal a menos de 1.5 km.</a:t>
+              <a:t>Revisar efectividad y horarios del patrullaje en los 95 sectores saturados, donde ya hay base y personal a menos de 1.5 km.</a:t>
             </a:r>
           </a:p>
         </p:txBody>
@@ -9436,7 +9436,7 @@
                 </a:solidFill>
                 <a:latin typeface="Segoe UI"/>
               </a:rPr>
-              <a:t>Solicitar a la FGJEM las carpetas de los 37 casos de prioridad alta y turnarlos a Criminalística.</a:t>
+              <a:t>Solicitar a la FGJEM las carpetas de los 64 casos de prioridad alta y turnarlos a Criminalística.</a:t>
             </a:r>
           </a:p>
         </p:txBody>

--- a/presentacion/SIGEO-HD_Reunion_Mandos.pptx
+++ b/presentacion/SIGEO-HD_Reunion_Mandos.pptx
@@ -3304,7 +3304,7 @@
                 </a:solidFill>
                 <a:latin typeface="Segoe UI"/>
               </a:rPr>
-              <a:t>Documento de trabajo interno · generado 2026-08-11 09:30 · cifras sin validar por las áreas responsables</a:t>
+              <a:t>Documento de trabajo interno · generado 2026-08-13 07:58 · cifras sin validar por las áreas responsables</a:t>
             </a:r>
           </a:p>
         </p:txBody>

--- a/presentacion/SIGEO-HD_Reunion_Mandos.pptx
+++ b/presentacion/SIGEO-HD_Reunion_Mandos.pptx
@@ -3304,7 +3304,7 @@
                 </a:solidFill>
                 <a:latin typeface="Segoe UI"/>
               </a:rPr>
-              <a:t>Documento de trabajo interno · generado 2026-08-13 07:58 · cifras sin validar por las áreas responsables</a:t>
+              <a:t>Documento de trabajo interno · generado 2026-08-13 13:46 · cifras sin validar por las áreas responsables</a:t>
             </a:r>
           </a:p>
         </p:txBody>
@@ -4065,7 +4065,7 @@
                 </a:solidFill>
                 <a:latin typeface="Segoe UI"/>
               </a:rPr>
-              <a:t>PERSONAL DESPLEGADO</a:t>
+              <a:t>HOMICIDIOS LEJOS DE BASE</a:t>
             </a:r>
           </a:p>
         </p:txBody>
@@ -4104,7 +4104,7 @@
                 </a:solidFill>
                 <a:latin typeface="Segoe UI"/>
               </a:rPr>
-              <a:t>10,877</a:t>
+              <a:t>211</a:t>
             </a:r>
           </a:p>
         </p:txBody>
@@ -4143,7 +4143,7 @@
                 </a:solidFill>
                 <a:latin typeface="Segoe UI"/>
               </a:rPr>
-              <a:t>en 167 bases en uso</a:t>
+              <a:t>a más de 3 km de la base más cercana</a:t>
             </a:r>
           </a:p>
         </p:txBody>
@@ -4346,7 +4346,7 @@
                 </a:solidFill>
                 <a:latin typeface="Segoe UI"/>
               </a:rPr>
-              <a:t>La columna que decide: carga de violencia por cada 100 elementos adscritos</a:t>
+              <a:t>Carga de violencia y presión relativa al despliegue de cada coordinación</a:t>
             </a:r>
           </a:p>
         </p:txBody>
@@ -4433,11 +4433,11 @@
                 <a:tableStyleId>{5C22544A-7EE6-4342-B048-85BDC9FD1C3A}</a:tableStyleId>
               </a:tblPr>
               <a:tblGrid>
-                <a:gridCol w="2052000"/>
-                <a:gridCol w="702000"/>
-                <a:gridCol w="594000"/>
+                <a:gridCol w="1944000"/>
+                <a:gridCol w="648000"/>
+                <a:gridCol w="540000"/>
+                <a:gridCol w="1188000"/>
                 <a:gridCol w="1080000"/>
-                <a:gridCol w="972000"/>
               </a:tblGrid>
               <a:tr h="232400">
                 <a:tc>
@@ -4522,7 +4522,7 @@
                           </a:solidFill>
                           <a:latin typeface="Segoe UI"/>
                         </a:rPr>
-                        <a:t>Personal</a:t>
+                        <a:t>Despliegue</a:t>
                       </a:r>
                     </a:p>
                   </a:txBody>
@@ -4545,7 +4545,7 @@
                           </a:solidFill>
                           <a:latin typeface="Segoe UI"/>
                         </a:rPr>
-                        <a:t>/100 el.</a:t>
+                        <a:t>Presión rel.</a:t>
                       </a:r>
                     </a:p>
                   </a:txBody>
@@ -4639,7 +4639,7 @@
                           </a:solidFill>
                           <a:latin typeface="Segoe UI"/>
                         </a:rPr>
-                        <a:t>1,590</a:t>
+                        <a:t>Medio</a:t>
                       </a:r>
                     </a:p>
                   </a:txBody>
@@ -4662,7 +4662,7 @@
                           </a:solidFill>
                           <a:latin typeface="Segoe UI"/>
                         </a:rPr>
-                        <a:t>219.0</a:t>
+                        <a:t>Alta</a:t>
                       </a:r>
                     </a:p>
                   </a:txBody>
@@ -4756,7 +4756,7 @@
                           </a:solidFill>
                           <a:latin typeface="Segoe UI"/>
                         </a:rPr>
-                        <a:t>1,841</a:t>
+                        <a:t>Amplio</a:t>
                       </a:r>
                     </a:p>
                   </a:txBody>
@@ -4779,7 +4779,7 @@
                           </a:solidFill>
                           <a:latin typeface="Segoe UI"/>
                         </a:rPr>
-                        <a:t>162.0</a:t>
+                        <a:t>Alta</a:t>
                       </a:r>
                     </a:p>
                   </a:txBody>
@@ -4873,7 +4873,7 @@
                           </a:solidFill>
                           <a:latin typeface="Segoe UI"/>
                         </a:rPr>
-                        <a:t>2,047</a:t>
+                        <a:t>Amplio</a:t>
                       </a:r>
                     </a:p>
                   </a:txBody>
@@ -4896,7 +4896,7 @@
                           </a:solidFill>
                           <a:latin typeface="Segoe UI"/>
                         </a:rPr>
-                        <a:t>99.8</a:t>
+                        <a:t>Media</a:t>
                       </a:r>
                     </a:p>
                   </a:txBody>
@@ -4990,7 +4990,7 @@
                           </a:solidFill>
                           <a:latin typeface="Segoe UI"/>
                         </a:rPr>
-                        <a:t>1,498</a:t>
+                        <a:t>Medio</a:t>
                       </a:r>
                     </a:p>
                   </a:txBody>
@@ -5013,7 +5013,7 @@
                           </a:solidFill>
                           <a:latin typeface="Segoe UI"/>
                         </a:rPr>
-                        <a:t>122.2</a:t>
+                        <a:t>Media</a:t>
                       </a:r>
                     </a:p>
                   </a:txBody>
@@ -5107,7 +5107,7 @@
                           </a:solidFill>
                           <a:latin typeface="Segoe UI"/>
                         </a:rPr>
-                        <a:t>1,699</a:t>
+                        <a:t>Medio</a:t>
                       </a:r>
                     </a:p>
                   </a:txBody>
@@ -5130,7 +5130,7 @@
                           </a:solidFill>
                           <a:latin typeface="Segoe UI"/>
                         </a:rPr>
-                        <a:t>66.4</a:t>
+                        <a:t>Media</a:t>
                       </a:r>
                     </a:p>
                   </a:txBody>
@@ -5224,7 +5224,7 @@
                           </a:solidFill>
                           <a:latin typeface="Segoe UI"/>
                         </a:rPr>
-                        <a:t>780</a:t>
+                        <a:t>Reducido</a:t>
                       </a:r>
                     </a:p>
                   </a:txBody>
@@ -5247,7 +5247,7 @@
                           </a:solidFill>
                           <a:latin typeface="Segoe UI"/>
                         </a:rPr>
-                        <a:t>56.3</a:t>
+                        <a:t>Baja</a:t>
                       </a:r>
                     </a:p>
                   </a:txBody>
@@ -5341,7 +5341,7 @@
                           </a:solidFill>
                           <a:latin typeface="Segoe UI"/>
                         </a:rPr>
-                        <a:t>876</a:t>
+                        <a:t>Reducido</a:t>
                       </a:r>
                     </a:p>
                   </a:txBody>
@@ -5364,7 +5364,7 @@
                           </a:solidFill>
                           <a:latin typeface="Segoe UI"/>
                         </a:rPr>
-                        <a:t>44.4</a:t>
+                        <a:t>Baja</a:t>
                       </a:r>
                     </a:p>
                   </a:txBody>
@@ -5458,7 +5458,7 @@
                           </a:solidFill>
                           <a:latin typeface="Segoe UI"/>
                         </a:rPr>
-                        <a:t>443</a:t>
+                        <a:t>Reducido</a:t>
                       </a:r>
                     </a:p>
                   </a:txBody>
@@ -5481,7 +5481,7 @@
                           </a:solidFill>
                           <a:latin typeface="Segoe UI"/>
                         </a:rPr>
-                        <a:t>35.4</a:t>
+                        <a:t>Baja</a:t>
                       </a:r>
                     </a:p>
                   </a:txBody>
@@ -5530,23 +5530,7 @@
                 </a:solidFill>
                 <a:latin typeface="Segoe UI"/>
               </a:rPr>
-              <a:t>Mide condiciones del territorio, no el desempeño de una persona: los insumos no contienen asignación nominal de mando, turnos ni recorridos.</a:t>
-            </a:r>
-          </a:p>
-          <a:p>
-            <a:pPr algn="l">
-              <a:lnSpc>
-                <a:spcPct val="115000"/>
-              </a:lnSpc>
-            </a:pPr>
-            <a:r>
-              <a:rPr sz="1000" b="0">
-                <a:solidFill>
-                  <a:srgbClr val="596573"/>
-                </a:solidFill>
-                <a:latin typeface="Segoe UI"/>
-              </a:rPr>
-              <a:t>22 de los 108 municipios se clasificaron por vecindad territorial al no tener inmueble propio en el inventario.</a:t>
+              <a:t>Mide condiciones del territorio, no el desempeño de una persona. Las cifras de personal no se detallan; se expresan como nivel de despliegue. La precisión numérica se reserva a los eventos de homicidio.</a:t>
             </a:r>
           </a:p>
         </p:txBody>
@@ -5788,10 +5772,10 @@
                 <a:tableStyleId>{5C22544A-7EE6-4342-B048-85BDC9FD1C3A}</a:tableStyleId>
               </a:tblPr>
               <a:tblGrid>
-                <a:gridCol w="2430000"/>
+                <a:gridCol w="2268000"/>
+                <a:gridCol w="864000"/>
                 <a:gridCol w="972000"/>
-                <a:gridCol w="1026000"/>
-                <a:gridCol w="972000"/>
+                <a:gridCol w="1296000"/>
               </a:tblGrid>
               <a:tr h="232400">
                 <a:tc>
@@ -5876,7 +5860,7 @@
                           </a:solidFill>
                           <a:latin typeface="Segoe UI"/>
                         </a:rPr>
-                        <a:t>Personal 3 km</a:t>
+                        <a:t>Despliegue</a:t>
                       </a:r>
                     </a:p>
                   </a:txBody>
@@ -5970,7 +5954,7 @@
                           </a:solidFill>
                           <a:latin typeface="Segoe UI"/>
                         </a:rPr>
-                        <a:t>0</a:t>
+                        <a:t>Sin despliegue cercano</a:t>
                       </a:r>
                     </a:p>
                   </a:txBody>
@@ -6064,7 +6048,7 @@
                           </a:solidFill>
                           <a:latin typeface="Segoe UI"/>
                         </a:rPr>
-                        <a:t>0</a:t>
+                        <a:t>Sin despliegue cercano</a:t>
                       </a:r>
                     </a:p>
                   </a:txBody>
@@ -6158,7 +6142,7 @@
                           </a:solidFill>
                           <a:latin typeface="Segoe UI"/>
                         </a:rPr>
-                        <a:t>0</a:t>
+                        <a:t>Sin despliegue cercano</a:t>
                       </a:r>
                     </a:p>
                   </a:txBody>
@@ -6252,7 +6236,7 @@
                           </a:solidFill>
                           <a:latin typeface="Segoe UI"/>
                         </a:rPr>
-                        <a:t>0</a:t>
+                        <a:t>Sin despliegue cercano</a:t>
                       </a:r>
                     </a:p>
                   </a:txBody>
@@ -6346,7 +6330,7 @@
                           </a:solidFill>
                           <a:latin typeface="Segoe UI"/>
                         </a:rPr>
-                        <a:t>0</a:t>
+                        <a:t>Sin despliegue cercano</a:t>
                       </a:r>
                     </a:p>
                   </a:txBody>
@@ -6440,7 +6424,7 @@
                           </a:solidFill>
                           <a:latin typeface="Segoe UI"/>
                         </a:rPr>
-                        <a:t>0</a:t>
+                        <a:t>Sin despliegue cercano</a:t>
                       </a:r>
                     </a:p>
                   </a:txBody>
@@ -6534,7 +6518,7 @@
                           </a:solidFill>
                           <a:latin typeface="Segoe UI"/>
                         </a:rPr>
-                        <a:t>0</a:t>
+                        <a:t>Sin despliegue cercano</a:t>
                       </a:r>
                     </a:p>
                   </a:txBody>
@@ -6628,7 +6612,7 @@
                           </a:solidFill>
                           <a:latin typeface="Segoe UI"/>
                         </a:rPr>
-                        <a:t>0</a:t>
+                        <a:t>Sin despliegue cercano</a:t>
                       </a:r>
                     </a:p>
                   </a:txBody>
@@ -6701,10 +6685,10 @@
                 <a:tableStyleId>{5C22544A-7EE6-4342-B048-85BDC9FD1C3A}</a:tableStyleId>
               </a:tblPr>
               <a:tblGrid>
-                <a:gridCol w="2430000"/>
+                <a:gridCol w="2268000"/>
+                <a:gridCol w="864000"/>
                 <a:gridCol w="972000"/>
-                <a:gridCol w="1026000"/>
-                <a:gridCol w="972000"/>
+                <a:gridCol w="1296000"/>
               </a:tblGrid>
               <a:tr h="232400">
                 <a:tc>
@@ -6789,7 +6773,7 @@
                           </a:solidFill>
                           <a:latin typeface="Segoe UI"/>
                         </a:rPr>
-                        <a:t>Personal 3 km</a:t>
+                        <a:t>Despliegue</a:t>
                       </a:r>
                     </a:p>
                   </a:txBody>
@@ -6883,7 +6867,7 @@
                           </a:solidFill>
                           <a:latin typeface="Segoe UI"/>
                         </a:rPr>
-                        <a:t>108</a:t>
+                        <a:t>Amplio</a:t>
                       </a:r>
                     </a:p>
                   </a:txBody>
@@ -6977,7 +6961,7 @@
                           </a:solidFill>
                           <a:latin typeface="Segoe UI"/>
                         </a:rPr>
-                        <a:t>149</a:t>
+                        <a:t>Amplio</a:t>
                       </a:r>
                     </a:p>
                   </a:txBody>
@@ -7071,7 +7055,7 @@
                           </a:solidFill>
                           <a:latin typeface="Segoe UI"/>
                         </a:rPr>
-                        <a:t>96</a:t>
+                        <a:t>Amplio</a:t>
                       </a:r>
                     </a:p>
                   </a:txBody>
@@ -7165,7 +7149,7 @@
                           </a:solidFill>
                           <a:latin typeface="Segoe UI"/>
                         </a:rPr>
-                        <a:t>297</a:t>
+                        <a:t>Amplio</a:t>
                       </a:r>
                     </a:p>
                   </a:txBody>
@@ -7259,7 +7243,7 @@
                           </a:solidFill>
                           <a:latin typeface="Segoe UI"/>
                         </a:rPr>
-                        <a:t>203</a:t>
+                        <a:t>Amplio</a:t>
                       </a:r>
                     </a:p>
                   </a:txBody>
@@ -7353,7 +7337,7 @@
                           </a:solidFill>
                           <a:latin typeface="Segoe UI"/>
                         </a:rPr>
-                        <a:t>229</a:t>
+                        <a:t>Amplio</a:t>
                       </a:r>
                     </a:p>
                   </a:txBody>
@@ -7447,7 +7431,7 @@
                           </a:solidFill>
                           <a:latin typeface="Segoe UI"/>
                         </a:rPr>
-                        <a:t>163</a:t>
+                        <a:t>Amplio</a:t>
                       </a:r>
                     </a:p>
                   </a:txBody>
@@ -7541,7 +7525,7 @@
                           </a:solidFill>
                           <a:latin typeface="Segoe UI"/>
                         </a:rPr>
-                        <a:t>99</a:t>
+                        <a:t>Amplio</a:t>
                       </a:r>
                     </a:p>
                   </a:txBody>
